--- a/deck/锈鉴智检-低成本高精度钢材质检专家.pptx
+++ b/deck/锈鉴智检-低成本高精度钢材质检专家.pptx
@@ -3286,16 +3286,14 @@
         </p:nvSpPr>
         <p:spPr>
           <a:xfrm>
-            <a:off x="2395728" y="475488"/>
-            <a:ext cx="4352544" cy="365760"/>
-          </a:xfrm>
-          <a:prstGeom prst="roundRect">
-            <a:avLst>
-              <a:gd name="adj" fmla="val 50000"/>
-            </a:avLst>
+            <a:off x="457200" y="498348"/>
+            <a:ext cx="109728" cy="109728"/>
+          </a:xfrm>
+          <a:prstGeom prst="ellipse">
+            <a:avLst/>
           </a:prstGeom>
           <a:solidFill>
-            <a:srgbClr val="E3F4F6"/>
+            <a:srgbClr val="F5A623"/>
           </a:solidFill>
           <a:ln/>
         </p:spPr>
@@ -3308,31 +3306,31 @@
         </p:nvSpPr>
         <p:spPr>
           <a:xfrm>
-            <a:off x="2395728" y="475488"/>
-            <a:ext cx="4352544" cy="365760"/>
-          </a:xfrm>
-          <a:prstGeom prst="rect">
-            <a:avLst/>
-          </a:prstGeom>
-          <a:noFill/>
-          <a:ln/>
-        </p:spPr>
-        <p:txBody>
-          <a:bodyPr wrap="square" lIns="0" tIns="0" rIns="0" bIns="0" rtlCol="0" anchor="ctr">
-            <a:normAutofit/>
-          </a:bodyPr>
-          <a:lstStyle/>
-          <a:p>
-            <a:pPr algn="ctr" indent="0" marL="0">
-              <a:lnSpc>
-                <a:spcPct val="112000"/>
-              </a:lnSpc>
-              <a:buNone/>
-            </a:pPr>
-            <a:r>
-              <a:rPr lang="en-US" sz="1200" b="1" dirty="0">
-                <a:solidFill>
-                  <a:srgbClr val="0B7A86"/>
+            <a:off x="658368" y="429768"/>
+            <a:ext cx="6400800" cy="274320"/>
+          </a:xfrm>
+          <a:prstGeom prst="rect">
+            <a:avLst/>
+          </a:prstGeom>
+          <a:noFill/>
+          <a:ln/>
+        </p:spPr>
+        <p:txBody>
+          <a:bodyPr wrap="square" lIns="0" tIns="0" rIns="0" bIns="0" rtlCol="0" anchor="t">
+            <a:normAutofit/>
+          </a:bodyPr>
+          <a:lstStyle/>
+          <a:p>
+            <a:pPr algn="l" indent="0" marL="0">
+              <a:lnSpc>
+                <a:spcPct val="112000"/>
+              </a:lnSpc>
+              <a:buNone/>
+            </a:pPr>
+            <a:r>
+              <a:rPr lang="en-US" sz="1200" dirty="0">
+                <a:solidFill>
+                  <a:srgbClr val="FFFFFF"/>
                 </a:solidFill>
                 <a:latin typeface="Microsoft YaHei" pitchFamily="34" charset="0"/>
                 <a:ea typeface="Microsoft YaHei" pitchFamily="34" charset="-122"/>
@@ -3346,262 +3344,371 @@
       </p:sp>
       <p:sp>
         <p:nvSpPr>
-          <p:cNvPr id="4" name="Shape 2"/>
-          <p:cNvSpPr/>
-          <p:nvPr/>
-        </p:nvSpPr>
-        <p:spPr>
-          <a:xfrm>
-            <a:off x="4174236" y="1188720"/>
-            <a:ext cx="109728" cy="109728"/>
+          <p:cNvPr id="4" name="Text 2"/>
+          <p:cNvSpPr/>
+          <p:nvPr/>
+        </p:nvSpPr>
+        <p:spPr>
+          <a:xfrm>
+            <a:off x="7680960" y="429768"/>
+            <a:ext cx="1005840" cy="274320"/>
+          </a:xfrm>
+          <a:prstGeom prst="rect">
+            <a:avLst/>
+          </a:prstGeom>
+          <a:noFill/>
+          <a:ln/>
+        </p:spPr>
+        <p:txBody>
+          <a:bodyPr wrap="square" lIns="0" tIns="0" rIns="0" bIns="0" rtlCol="0" anchor="t">
+            <a:normAutofit/>
+          </a:bodyPr>
+          <a:lstStyle/>
+          <a:p>
+            <a:pPr algn="r" indent="0" marL="0">
+              <a:lnSpc>
+                <a:spcPct val="112000"/>
+              </a:lnSpc>
+              <a:buNone/>
+            </a:pPr>
+            <a:r>
+              <a:rPr lang="en-US" sz="1100" dirty="0">
+                <a:solidFill>
+                  <a:srgbClr val="8FA8BC"/>
+                </a:solidFill>
+                <a:latin typeface="Microsoft YaHei" pitchFamily="34" charset="0"/>
+                <a:ea typeface="Microsoft YaHei" pitchFamily="34" charset="-122"/>
+                <a:cs typeface="Microsoft YaHei" pitchFamily="34" charset="-120"/>
+              </a:rPr>
+              <a:t>2024.10</a:t>
+            </a:r>
+            <a:endParaRPr lang="en-US" sz="1100" dirty="0"/>
+          </a:p>
+        </p:txBody>
+      </p:sp>
+      <p:sp>
+        <p:nvSpPr>
+          <p:cNvPr id="5" name="Text 3"/>
+          <p:cNvSpPr/>
+          <p:nvPr/>
+        </p:nvSpPr>
+        <p:spPr>
+          <a:xfrm>
+            <a:off x="457200" y="950976"/>
+            <a:ext cx="5486400" cy="310896"/>
+          </a:xfrm>
+          <a:prstGeom prst="rect">
+            <a:avLst/>
+          </a:prstGeom>
+          <a:noFill/>
+          <a:ln/>
+        </p:spPr>
+        <p:txBody>
+          <a:bodyPr wrap="square" lIns="0" tIns="0" rIns="0" bIns="0" rtlCol="0" anchor="t">
+            <a:normAutofit/>
+          </a:bodyPr>
+          <a:lstStyle/>
+          <a:p>
+            <a:pPr algn="l" indent="0" marL="0">
+              <a:lnSpc>
+                <a:spcPct val="112000"/>
+              </a:lnSpc>
+              <a:buNone/>
+            </a:pPr>
+            <a:r>
+              <a:rPr lang="en-US" sz="1350" b="1" dirty="0">
+                <a:solidFill>
+                  <a:srgbClr val="F5A623"/>
+                </a:solidFill>
+                <a:latin typeface="Microsoft YaHei" pitchFamily="34" charset="0"/>
+                <a:ea typeface="Microsoft YaHei" pitchFamily="34" charset="-122"/>
+                <a:cs typeface="Microsoft YaHei" pitchFamily="34" charset="-120"/>
+              </a:rPr>
+              <a:t>学生赛道（本科组）</a:t>
+            </a:r>
+            <a:endParaRPr lang="en-US" sz="1350" dirty="0"/>
+          </a:p>
+        </p:txBody>
+      </p:sp>
+      <p:sp>
+        <p:nvSpPr>
+          <p:cNvPr id="6" name="Text 4"/>
+          <p:cNvSpPr/>
+          <p:nvPr/>
+        </p:nvSpPr>
+        <p:spPr>
+          <a:xfrm>
+            <a:off x="457200" y="1426464"/>
+            <a:ext cx="8046720" cy="868680"/>
+          </a:xfrm>
+          <a:prstGeom prst="rect">
+            <a:avLst/>
+          </a:prstGeom>
+          <a:noFill/>
+          <a:ln/>
+        </p:spPr>
+        <p:txBody>
+          <a:bodyPr wrap="square" lIns="0" tIns="0" rIns="0" bIns="0" rtlCol="0" anchor="t">
+            <a:normAutofit/>
+          </a:bodyPr>
+          <a:lstStyle/>
+          <a:p>
+            <a:pPr algn="l" indent="0" marL="0">
+              <a:lnSpc>
+                <a:spcPct val="112000"/>
+              </a:lnSpc>
+              <a:buNone/>
+            </a:pPr>
+            <a:r>
+              <a:rPr lang="en-US" sz="5400" b="1" dirty="0">
+                <a:solidFill>
+                  <a:srgbClr val="FFFFFF"/>
+                </a:solidFill>
+                <a:latin typeface="Microsoft YaHei" pitchFamily="34" charset="0"/>
+                <a:ea typeface="Microsoft YaHei" pitchFamily="34" charset="-122"/>
+                <a:cs typeface="Microsoft YaHei" pitchFamily="34" charset="-120"/>
+              </a:rPr>
+              <a:t>「锈鉴智检」</a:t>
+            </a:r>
+            <a:endParaRPr lang="en-US" sz="5400" dirty="0"/>
+          </a:p>
+        </p:txBody>
+      </p:sp>
+      <p:sp>
+        <p:nvSpPr>
+          <p:cNvPr id="7" name="Shape 5"/>
+          <p:cNvSpPr/>
+          <p:nvPr/>
+        </p:nvSpPr>
+        <p:spPr>
+          <a:xfrm>
+            <a:off x="5760720" y="2139696"/>
+            <a:ext cx="1143000" cy="50292"/>
           </a:xfrm>
           <a:prstGeom prst="rect">
             <a:avLst/>
           </a:prstGeom>
           <a:solidFill>
-            <a:srgbClr val="0FA3B1"/>
+            <a:srgbClr val="F5A623"/>
           </a:solidFill>
           <a:ln/>
         </p:spPr>
       </p:sp>
       <p:sp>
         <p:nvSpPr>
-          <p:cNvPr id="5" name="Shape 3"/>
-          <p:cNvSpPr/>
-          <p:nvPr/>
-        </p:nvSpPr>
-        <p:spPr>
-          <a:xfrm>
-            <a:off x="4402836" y="1188720"/>
-            <a:ext cx="109728" cy="109728"/>
+          <p:cNvPr id="8" name="Text 6"/>
+          <p:cNvSpPr/>
+          <p:nvPr/>
+        </p:nvSpPr>
+        <p:spPr>
+          <a:xfrm>
+            <a:off x="457200" y="2432304"/>
+            <a:ext cx="8229600" cy="502920"/>
+          </a:xfrm>
+          <a:prstGeom prst="rect">
+            <a:avLst/>
+          </a:prstGeom>
+          <a:noFill/>
+          <a:ln/>
+        </p:spPr>
+        <p:txBody>
+          <a:bodyPr wrap="square" lIns="0" tIns="0" rIns="0" bIns="0" rtlCol="0" anchor="t">
+            <a:normAutofit/>
+          </a:bodyPr>
+          <a:lstStyle/>
+          <a:p>
+            <a:pPr algn="l" indent="0" marL="0">
+              <a:lnSpc>
+                <a:spcPct val="112000"/>
+              </a:lnSpc>
+              <a:buNone/>
+            </a:pPr>
+            <a:r>
+              <a:rPr lang="en-US" sz="2700" b="1" dirty="0">
+                <a:solidFill>
+                  <a:srgbClr val="FFFFFF"/>
+                </a:solidFill>
+                <a:latin typeface="Microsoft YaHei" pitchFamily="34" charset="0"/>
+                <a:ea typeface="Microsoft YaHei" pitchFamily="34" charset="-122"/>
+                <a:cs typeface="Microsoft YaHei" pitchFamily="34" charset="-120"/>
+              </a:rPr>
+              <a:t>低成本高精度钢材质检专家</a:t>
+            </a:r>
+            <a:endParaRPr lang="en-US" sz="2700" dirty="0"/>
+          </a:p>
+        </p:txBody>
+      </p:sp>
+      <p:sp>
+        <p:nvSpPr>
+          <p:cNvPr id="9" name="Text 7"/>
+          <p:cNvSpPr/>
+          <p:nvPr/>
+        </p:nvSpPr>
+        <p:spPr>
+          <a:xfrm>
+            <a:off x="457200" y="3145536"/>
+            <a:ext cx="8229600" cy="365760"/>
+          </a:xfrm>
+          <a:prstGeom prst="rect">
+            <a:avLst/>
+          </a:prstGeom>
+          <a:noFill/>
+          <a:ln/>
+        </p:spPr>
+        <p:txBody>
+          <a:bodyPr wrap="square" lIns="0" tIns="0" rIns="0" bIns="0" rtlCol="0" anchor="t">
+            <a:normAutofit/>
+          </a:bodyPr>
+          <a:lstStyle/>
+          <a:p>
+            <a:pPr algn="l" indent="0" marL="0">
+              <a:lnSpc>
+                <a:spcPct val="112000"/>
+              </a:lnSpc>
+              <a:buNone/>
+            </a:pPr>
+            <a:r>
+              <a:rPr lang="en-US" sz="1500" dirty="0">
+                <a:solidFill>
+                  <a:srgbClr val="AAC4D6"/>
+                </a:solidFill>
+                <a:latin typeface="Microsoft YaHei" pitchFamily="34" charset="0"/>
+                <a:ea typeface="Microsoft YaHei" pitchFamily="34" charset="-122"/>
+                <a:cs typeface="Microsoft YaHei" pitchFamily="34" charset="-120"/>
+              </a:rPr>
+              <a:t>让高质量质检普惠每一家中小工厂</a:t>
+            </a:r>
+            <a:endParaRPr lang="en-US" sz="1500" dirty="0"/>
+          </a:p>
+        </p:txBody>
+      </p:sp>
+      <p:sp>
+        <p:nvSpPr>
+          <p:cNvPr id="10" name="Shape 8"/>
+          <p:cNvSpPr/>
+          <p:nvPr/>
+        </p:nvSpPr>
+        <p:spPr>
+          <a:xfrm>
+            <a:off x="457200" y="4078224"/>
+            <a:ext cx="8229600" cy="10973"/>
           </a:xfrm>
           <a:prstGeom prst="rect">
             <a:avLst/>
           </a:prstGeom>
           <a:solidFill>
-            <a:srgbClr val="0FA3B1"/>
+            <a:srgbClr val="2E4A63"/>
           </a:solidFill>
           <a:ln/>
         </p:spPr>
       </p:sp>
       <p:sp>
         <p:nvSpPr>
-          <p:cNvPr id="6" name="Shape 4"/>
-          <p:cNvSpPr/>
-          <p:nvPr/>
-        </p:nvSpPr>
-        <p:spPr>
-          <a:xfrm>
-            <a:off x="4631436" y="1188720"/>
-            <a:ext cx="109728" cy="109728"/>
-          </a:xfrm>
-          <a:prstGeom prst="rect">
-            <a:avLst/>
-          </a:prstGeom>
-          <a:solidFill>
-            <a:srgbClr val="0FA3B1"/>
-          </a:solidFill>
-          <a:ln/>
-        </p:spPr>
-      </p:sp>
-      <p:sp>
-        <p:nvSpPr>
-          <p:cNvPr id="7" name="Shape 5"/>
-          <p:cNvSpPr/>
-          <p:nvPr/>
-        </p:nvSpPr>
-        <p:spPr>
-          <a:xfrm>
-            <a:off x="4860036" y="1188720"/>
-            <a:ext cx="109728" cy="109728"/>
-          </a:xfrm>
-          <a:prstGeom prst="rect">
-            <a:avLst/>
-          </a:prstGeom>
-          <a:solidFill>
-            <a:srgbClr val="0FA3B1"/>
-          </a:solidFill>
-          <a:ln/>
-        </p:spPr>
-      </p:sp>
-      <p:sp>
-        <p:nvSpPr>
-          <p:cNvPr id="8" name="Text 6"/>
-          <p:cNvSpPr/>
-          <p:nvPr/>
-        </p:nvSpPr>
-        <p:spPr>
-          <a:xfrm>
-            <a:off x="457200" y="1481328"/>
-            <a:ext cx="8229600" cy="868680"/>
-          </a:xfrm>
-          <a:prstGeom prst="rect">
-            <a:avLst/>
-          </a:prstGeom>
-          <a:noFill/>
-          <a:ln/>
-        </p:spPr>
-        <p:txBody>
-          <a:bodyPr wrap="square" lIns="0" tIns="0" rIns="0" bIns="0" rtlCol="0" anchor="t">
-            <a:normAutofit/>
-          </a:bodyPr>
-          <a:lstStyle/>
-          <a:p>
-            <a:pPr algn="ctr" indent="0" marL="0">
-              <a:lnSpc>
-                <a:spcPct val="112000"/>
-              </a:lnSpc>
-              <a:buNone/>
-            </a:pPr>
-            <a:r>
-              <a:rPr lang="en-US" sz="5400" b="1" dirty="0">
-                <a:solidFill>
-                  <a:srgbClr val="FFFFFF"/>
-                </a:solidFill>
-                <a:latin typeface="Microsoft YaHei" pitchFamily="34" charset="0"/>
-                <a:ea typeface="Microsoft YaHei" pitchFamily="34" charset="-122"/>
-                <a:cs typeface="Microsoft YaHei" pitchFamily="34" charset="-120"/>
-              </a:rPr>
-              <a:t>「锈鉴智检」</a:t>
-            </a:r>
-            <a:endParaRPr lang="en-US" sz="5400" dirty="0"/>
-          </a:p>
-        </p:txBody>
-      </p:sp>
-      <p:sp>
-        <p:nvSpPr>
-          <p:cNvPr id="9" name="Text 7"/>
-          <p:cNvSpPr/>
-          <p:nvPr/>
-        </p:nvSpPr>
-        <p:spPr>
-          <a:xfrm>
-            <a:off x="457200" y="2432304"/>
-            <a:ext cx="8229600" cy="457200"/>
-          </a:xfrm>
-          <a:prstGeom prst="rect">
-            <a:avLst/>
-          </a:prstGeom>
-          <a:noFill/>
-          <a:ln/>
-        </p:spPr>
-        <p:txBody>
-          <a:bodyPr wrap="square" lIns="0" tIns="0" rIns="0" bIns="0" rtlCol="0" anchor="t">
-            <a:normAutofit/>
-          </a:bodyPr>
-          <a:lstStyle/>
-          <a:p>
-            <a:pPr algn="ctr" indent="0" marL="0">
-              <a:lnSpc>
-                <a:spcPct val="112000"/>
-              </a:lnSpc>
-              <a:buNone/>
-            </a:pPr>
-            <a:r>
-              <a:rPr lang="en-US" sz="2600" b="1" dirty="0">
-                <a:solidFill>
-                  <a:srgbClr val="0FA3B1"/>
-                </a:solidFill>
-                <a:latin typeface="Microsoft YaHei" pitchFamily="34" charset="0"/>
-                <a:ea typeface="Microsoft YaHei" pitchFamily="34" charset="-122"/>
-                <a:cs typeface="Microsoft YaHei" pitchFamily="34" charset="-120"/>
-              </a:rPr>
-              <a:t>—— 低成本高精度钢材质检专家</a:t>
-            </a:r>
-            <a:endParaRPr lang="en-US" sz="2600" dirty="0"/>
-          </a:p>
-        </p:txBody>
-      </p:sp>
-      <p:sp>
-        <p:nvSpPr>
-          <p:cNvPr id="10" name="Text 8"/>
-          <p:cNvSpPr/>
-          <p:nvPr/>
-        </p:nvSpPr>
-        <p:spPr>
-          <a:xfrm>
-            <a:off x="457200" y="3072384"/>
-            <a:ext cx="8229600" cy="365760"/>
-          </a:xfrm>
-          <a:prstGeom prst="rect">
-            <a:avLst/>
-          </a:prstGeom>
-          <a:noFill/>
-          <a:ln/>
-        </p:spPr>
-        <p:txBody>
-          <a:bodyPr wrap="square" lIns="0" tIns="0" rIns="0" bIns="0" rtlCol="0" anchor="t">
-            <a:normAutofit/>
-          </a:bodyPr>
-          <a:lstStyle/>
-          <a:p>
-            <a:pPr algn="ctr" indent="0" marL="0">
-              <a:lnSpc>
-                <a:spcPct val="112000"/>
-              </a:lnSpc>
-              <a:buNone/>
-            </a:pPr>
-            <a:r>
-              <a:rPr lang="en-US" sz="1500" dirty="0">
-                <a:solidFill>
-                  <a:srgbClr val="AAC4D6"/>
-                </a:solidFill>
-                <a:latin typeface="Microsoft YaHei" pitchFamily="34" charset="0"/>
-                <a:ea typeface="Microsoft YaHei" pitchFamily="34" charset="-122"/>
-                <a:cs typeface="Microsoft YaHei" pitchFamily="34" charset="-120"/>
-              </a:rPr>
-              <a:t>让高质量质检普惠每一家中小工厂</a:t>
-            </a:r>
-            <a:endParaRPr lang="en-US" sz="1500" dirty="0"/>
-          </a:p>
-        </p:txBody>
-      </p:sp>
-      <p:sp>
-        <p:nvSpPr>
-          <p:cNvPr id="11" name="Shape 9"/>
-          <p:cNvSpPr/>
-          <p:nvPr/>
-        </p:nvSpPr>
-        <p:spPr>
-          <a:xfrm>
-            <a:off x="640080" y="3675888"/>
-            <a:ext cx="7863840" cy="1115568"/>
-          </a:xfrm>
-          <a:prstGeom prst="roundRect">
-            <a:avLst>
-              <a:gd name="adj" fmla="val 6557"/>
-            </a:avLst>
-          </a:prstGeom>
-          <a:solidFill>
-            <a:srgbClr val="16324A"/>
-          </a:solidFill>
-          <a:ln w="12700">
-            <a:solidFill>
-              <a:srgbClr val="2A4A66"/>
-            </a:solidFill>
-            <a:prstDash val="solid"/>
-          </a:ln>
-        </p:spPr>
-      </p:sp>
-      <p:sp>
-        <p:nvSpPr>
-          <p:cNvPr id="12" name="Shape 10"/>
-          <p:cNvSpPr/>
-          <p:nvPr/>
-        </p:nvSpPr>
-        <p:spPr>
-          <a:xfrm>
-            <a:off x="4572000" y="3858768"/>
-            <a:ext cx="10973" cy="768096"/>
-          </a:xfrm>
-          <a:prstGeom prst="rect">
-            <a:avLst/>
-          </a:prstGeom>
-          <a:solidFill>
-            <a:srgbClr val="2A4A66"/>
-          </a:solidFill>
-          <a:ln/>
-        </p:spPr>
+          <p:cNvPr id="11" name="Text 9"/>
+          <p:cNvSpPr/>
+          <p:nvPr/>
+        </p:nvSpPr>
+        <p:spPr>
+          <a:xfrm>
+            <a:off x="457200" y="4279392"/>
+            <a:ext cx="2834640" cy="219456"/>
+          </a:xfrm>
+          <a:prstGeom prst="rect">
+            <a:avLst/>
+          </a:prstGeom>
+          <a:noFill/>
+          <a:ln/>
+        </p:spPr>
+        <p:txBody>
+          <a:bodyPr wrap="square" lIns="0" tIns="0" rIns="0" bIns="0" rtlCol="0" anchor="t">
+            <a:normAutofit/>
+          </a:bodyPr>
+          <a:lstStyle/>
+          <a:p>
+            <a:pPr algn="l" indent="0" marL="0">
+              <a:lnSpc>
+                <a:spcPct val="112000"/>
+              </a:lnSpc>
+              <a:buNone/>
+            </a:pPr>
+            <a:r>
+              <a:rPr lang="en-US" sz="950" dirty="0">
+                <a:solidFill>
+                  <a:srgbClr val="8FA8BC"/>
+                </a:solidFill>
+                <a:latin typeface="Microsoft YaHei" pitchFamily="34" charset="0"/>
+                <a:ea typeface="Microsoft YaHei" pitchFamily="34" charset="-122"/>
+                <a:cs typeface="Microsoft YaHei" pitchFamily="34" charset="-120"/>
+              </a:rPr>
+              <a:t>学院 · 专业</a:t>
+            </a:r>
+            <a:endParaRPr lang="en-US" sz="950" dirty="0"/>
+          </a:p>
+        </p:txBody>
+      </p:sp>
+      <p:sp>
+        <p:nvSpPr>
+          <p:cNvPr id="12" name="Text 10"/>
+          <p:cNvSpPr/>
+          <p:nvPr/>
+        </p:nvSpPr>
+        <p:spPr>
+          <a:xfrm>
+            <a:off x="457200" y="4553712"/>
+            <a:ext cx="2834640" cy="457200"/>
+          </a:xfrm>
+          <a:prstGeom prst="rect">
+            <a:avLst/>
+          </a:prstGeom>
+          <a:noFill/>
+          <a:ln/>
+        </p:spPr>
+        <p:txBody>
+          <a:bodyPr wrap="square" lIns="0" tIns="0" rIns="0" bIns="0" rtlCol="0" anchor="t">
+            <a:normAutofit/>
+          </a:bodyPr>
+          <a:lstStyle/>
+          <a:p>
+            <a:pPr algn="l" indent="0" marL="0">
+              <a:lnSpc>
+                <a:spcPct val="125000"/>
+              </a:lnSpc>
+              <a:buNone/>
+            </a:pPr>
+            <a:r>
+              <a:rPr lang="en-US" sz="1030" dirty="0">
+                <a:solidFill>
+                  <a:srgbClr val="D5E2EC"/>
+                </a:solidFill>
+                <a:latin typeface="Microsoft YaHei" pitchFamily="34" charset="0"/>
+                <a:ea typeface="Microsoft YaHei" pitchFamily="34" charset="-122"/>
+                <a:cs typeface="Microsoft YaHei" pitchFamily="34" charset="-120"/>
+              </a:rPr>
+              <a:t>广西科技师范学院</a:t>
+            </a:r>
+            <a:endParaRPr lang="en-US" sz="1030" dirty="0"/>
+          </a:p>
+          <a:p>
+            <a:pPr algn="l" indent="0" marL="0">
+              <a:lnSpc>
+                <a:spcPct val="125000"/>
+              </a:lnSpc>
+              <a:buNone/>
+            </a:pPr>
+            <a:r>
+              <a:rPr lang="en-US" sz="1030" dirty="0">
+                <a:solidFill>
+                  <a:srgbClr val="D5E2EC"/>
+                </a:solidFill>
+                <a:latin typeface="Microsoft YaHei" pitchFamily="34" charset="0"/>
+                <a:ea typeface="Microsoft YaHei" pitchFamily="34" charset="-122"/>
+                <a:cs typeface="Microsoft YaHei" pitchFamily="34" charset="-120"/>
+              </a:rPr>
+              <a:t>先进制造工程学院 · 智能制造工程</a:t>
+            </a:r>
+            <a:endParaRPr lang="en-US" sz="1030" dirty="0"/>
+          </a:p>
+        </p:txBody>
       </p:sp>
       <p:sp>
         <p:nvSpPr>
@@ -3611,39 +3718,39 @@
         </p:nvSpPr>
         <p:spPr>
           <a:xfrm>
-            <a:off x="914400" y="3803904"/>
-            <a:ext cx="3429000" cy="256032"/>
-          </a:xfrm>
-          <a:prstGeom prst="rect">
-            <a:avLst/>
-          </a:prstGeom>
-          <a:noFill/>
-          <a:ln/>
-        </p:spPr>
-        <p:txBody>
-          <a:bodyPr wrap="square" lIns="0" tIns="0" rIns="0" bIns="0" rtlCol="0" anchor="t">
-            <a:normAutofit/>
-          </a:bodyPr>
-          <a:lstStyle/>
-          <a:p>
-            <a:pPr algn="l" indent="0" marL="0">
-              <a:lnSpc>
-                <a:spcPct val="112000"/>
-              </a:lnSpc>
-              <a:buNone/>
-            </a:pPr>
-            <a:r>
-              <a:rPr lang="en-US" sz="1250" b="1" dirty="0">
-                <a:solidFill>
-                  <a:srgbClr val="0FA3B1"/>
-                </a:solidFill>
-                <a:latin typeface="Microsoft YaHei" pitchFamily="34" charset="0"/>
-                <a:ea typeface="Microsoft YaHei" pitchFamily="34" charset="-122"/>
-                <a:cs typeface="Microsoft YaHei" pitchFamily="34" charset="-120"/>
-              </a:rPr>
-              <a:t>参赛赛道</a:t>
-            </a:r>
-            <a:endParaRPr lang="en-US" sz="1250" dirty="0"/>
+            <a:off x="3474720" y="4279392"/>
+            <a:ext cx="3291840" cy="219456"/>
+          </a:xfrm>
+          <a:prstGeom prst="rect">
+            <a:avLst/>
+          </a:prstGeom>
+          <a:noFill/>
+          <a:ln/>
+        </p:spPr>
+        <p:txBody>
+          <a:bodyPr wrap="square" lIns="0" tIns="0" rIns="0" bIns="0" rtlCol="0" anchor="t">
+            <a:normAutofit/>
+          </a:bodyPr>
+          <a:lstStyle/>
+          <a:p>
+            <a:pPr algn="l" indent="0" marL="0">
+              <a:lnSpc>
+                <a:spcPct val="112000"/>
+              </a:lnSpc>
+              <a:buNone/>
+            </a:pPr>
+            <a:r>
+              <a:rPr lang="en-US" sz="950" dirty="0">
+                <a:solidFill>
+                  <a:srgbClr val="8FA8BC"/>
+                </a:solidFill>
+                <a:latin typeface="Microsoft YaHei" pitchFamily="34" charset="0"/>
+                <a:ea typeface="Microsoft YaHei" pitchFamily="34" charset="-122"/>
+                <a:cs typeface="Microsoft YaHei" pitchFamily="34" charset="-120"/>
+              </a:rPr>
+              <a:t>团队 · 负责人</a:t>
+            </a:r>
+            <a:endParaRPr lang="en-US" sz="950" dirty="0"/>
           </a:p>
         </p:txBody>
       </p:sp>
@@ -3655,29 +3762,29 @@
         </p:nvSpPr>
         <p:spPr>
           <a:xfrm>
-            <a:off x="914400" y="4096512"/>
-            <a:ext cx="3401568" cy="658368"/>
-          </a:xfrm>
-          <a:prstGeom prst="rect">
-            <a:avLst/>
-          </a:prstGeom>
-          <a:noFill/>
-          <a:ln/>
-        </p:spPr>
-        <p:txBody>
-          <a:bodyPr wrap="square" lIns="0" tIns="0" rIns="0" bIns="0" rtlCol="0" anchor="t">
-            <a:normAutofit/>
-          </a:bodyPr>
-          <a:lstStyle/>
-          <a:p>
-            <a:pPr algn="l" indent="0" marL="0">
-              <a:lnSpc>
-                <a:spcPct val="130000"/>
-              </a:lnSpc>
-              <a:buNone/>
-            </a:pPr>
-            <a:r>
-              <a:rPr lang="en-US" sz="1080" dirty="0">
+            <a:off x="3474720" y="4553712"/>
+            <a:ext cx="3291840" cy="457200"/>
+          </a:xfrm>
+          <a:prstGeom prst="rect">
+            <a:avLst/>
+          </a:prstGeom>
+          <a:noFill/>
+          <a:ln/>
+        </p:spPr>
+        <p:txBody>
+          <a:bodyPr wrap="square" lIns="0" tIns="0" rIns="0" bIns="0" rtlCol="0" anchor="t">
+            <a:normAutofit/>
+          </a:bodyPr>
+          <a:lstStyle/>
+          <a:p>
+            <a:pPr algn="l" indent="0" marL="0">
+              <a:lnSpc>
+                <a:spcPct val="125000"/>
+              </a:lnSpc>
+              <a:buNone/>
+            </a:pPr>
+            <a:r>
+              <a:rPr lang="en-US" sz="1030" dirty="0">
                 <a:solidFill>
                   <a:srgbClr val="D5E2EC"/>
                 </a:solidFill>
@@ -3685,19 +3792,19 @@
                 <a:ea typeface="Microsoft YaHei" pitchFamily="34" charset="-122"/>
                 <a:cs typeface="Microsoft YaHei" pitchFamily="34" charset="-120"/>
               </a:rPr>
-              <a:t>学生赛道（本科组）</a:t>
-            </a:r>
-            <a:endParaRPr lang="en-US" sz="1080" dirty="0"/>
-          </a:p>
-          <a:p>
-            <a:pPr algn="l" indent="0" marL="0">
-              <a:lnSpc>
-                <a:spcPct val="130000"/>
-              </a:lnSpc>
-              <a:buNone/>
-            </a:pPr>
-            <a:r>
-              <a:rPr lang="en-US" sz="1080" dirty="0">
+              <a:t>锈鉴智检创新研发团队</a:t>
+            </a:r>
+            <a:endParaRPr lang="en-US" sz="1030" dirty="0"/>
+          </a:p>
+          <a:p>
+            <a:pPr algn="l" indent="0" marL="0">
+              <a:lnSpc>
+                <a:spcPct val="125000"/>
+              </a:lnSpc>
+              <a:buNone/>
+            </a:pPr>
+            <a:r>
+              <a:rPr lang="en-US" sz="1030" dirty="0">
                 <a:solidFill>
                   <a:srgbClr val="D5E2EC"/>
                 </a:solidFill>
@@ -3705,9 +3812,9 @@
                 <a:ea typeface="Microsoft YaHei" pitchFamily="34" charset="-122"/>
                 <a:cs typeface="Microsoft YaHei" pitchFamily="34" charset="-120"/>
               </a:rPr>
-              <a:t>广西科技师范学院 先进制造工程学院 · 智能制造工程</a:t>
-            </a:r>
-            <a:endParaRPr lang="en-US" sz="1080" dirty="0"/>
+              <a:t>负责人：谢宇｜成员：曹晓倩、伍锦琦、谢耀宽、何军</a:t>
+            </a:r>
+            <a:endParaRPr lang="en-US" sz="1030" dirty="0"/>
           </a:p>
         </p:txBody>
       </p:sp>
@@ -3719,39 +3826,39 @@
         </p:nvSpPr>
         <p:spPr>
           <a:xfrm>
-            <a:off x="4800600" y="3803904"/>
-            <a:ext cx="3520440" cy="256032"/>
-          </a:xfrm>
-          <a:prstGeom prst="rect">
-            <a:avLst/>
-          </a:prstGeom>
-          <a:noFill/>
-          <a:ln/>
-        </p:spPr>
-        <p:txBody>
-          <a:bodyPr wrap="square" lIns="0" tIns="0" rIns="0" bIns="0" rtlCol="0" anchor="t">
-            <a:normAutofit/>
-          </a:bodyPr>
-          <a:lstStyle/>
-          <a:p>
-            <a:pPr algn="l" indent="0" marL="0">
-              <a:lnSpc>
-                <a:spcPct val="112000"/>
-              </a:lnSpc>
-              <a:buNone/>
-            </a:pPr>
-            <a:r>
-              <a:rPr lang="en-US" sz="1250" b="1" dirty="0">
-                <a:solidFill>
-                  <a:srgbClr val="0FA3B1"/>
-                </a:solidFill>
-                <a:latin typeface="Microsoft YaHei" pitchFamily="34" charset="0"/>
-                <a:ea typeface="Microsoft YaHei" pitchFamily="34" charset="-122"/>
-                <a:cs typeface="Microsoft YaHei" pitchFamily="34" charset="-120"/>
-              </a:rPr>
-              <a:t>团队信息</a:t>
-            </a:r>
-            <a:endParaRPr lang="en-US" sz="1250" dirty="0"/>
+            <a:off x="6949440" y="4279392"/>
+            <a:ext cx="2194560" cy="219456"/>
+          </a:xfrm>
+          <a:prstGeom prst="rect">
+            <a:avLst/>
+          </a:prstGeom>
+          <a:noFill/>
+          <a:ln/>
+        </p:spPr>
+        <p:txBody>
+          <a:bodyPr wrap="square" lIns="0" tIns="0" rIns="0" bIns="0" rtlCol="0" anchor="t">
+            <a:normAutofit/>
+          </a:bodyPr>
+          <a:lstStyle/>
+          <a:p>
+            <a:pPr algn="l" indent="0" marL="0">
+              <a:lnSpc>
+                <a:spcPct val="112000"/>
+              </a:lnSpc>
+              <a:buNone/>
+            </a:pPr>
+            <a:r>
+              <a:rPr lang="en-US" sz="950" dirty="0">
+                <a:solidFill>
+                  <a:srgbClr val="8FA8BC"/>
+                </a:solidFill>
+                <a:latin typeface="Microsoft YaHei" pitchFamily="34" charset="0"/>
+                <a:ea typeface="Microsoft YaHei" pitchFamily="34" charset="-122"/>
+                <a:cs typeface="Microsoft YaHei" pitchFamily="34" charset="-120"/>
+              </a:rPr>
+              <a:t>指导教师</a:t>
+            </a:r>
+            <a:endParaRPr lang="en-US" sz="950" dirty="0"/>
           </a:p>
         </p:txBody>
       </p:sp>
@@ -3763,29 +3870,29 @@
         </p:nvSpPr>
         <p:spPr>
           <a:xfrm>
-            <a:off x="4800600" y="4096512"/>
-            <a:ext cx="3493008" cy="658368"/>
-          </a:xfrm>
-          <a:prstGeom prst="rect">
-            <a:avLst/>
-          </a:prstGeom>
-          <a:noFill/>
-          <a:ln/>
-        </p:spPr>
-        <p:txBody>
-          <a:bodyPr wrap="square" lIns="0" tIns="0" rIns="0" bIns="0" rtlCol="0" anchor="t">
-            <a:normAutofit/>
-          </a:bodyPr>
-          <a:lstStyle/>
-          <a:p>
-            <a:pPr algn="l" indent="0" marL="0">
-              <a:lnSpc>
-                <a:spcPct val="130000"/>
-              </a:lnSpc>
-              <a:buNone/>
-            </a:pPr>
-            <a:r>
-              <a:rPr lang="en-US" sz="1080" dirty="0">
+            <a:off x="6949440" y="4553712"/>
+            <a:ext cx="2194560" cy="457200"/>
+          </a:xfrm>
+          <a:prstGeom prst="rect">
+            <a:avLst/>
+          </a:prstGeom>
+          <a:noFill/>
+          <a:ln/>
+        </p:spPr>
+        <p:txBody>
+          <a:bodyPr wrap="square" lIns="0" tIns="0" rIns="0" bIns="0" rtlCol="0" anchor="t">
+            <a:normAutofit/>
+          </a:bodyPr>
+          <a:lstStyle/>
+          <a:p>
+            <a:pPr algn="l" indent="0" marL="0">
+              <a:lnSpc>
+                <a:spcPct val="125000"/>
+              </a:lnSpc>
+              <a:buNone/>
+            </a:pPr>
+            <a:r>
+              <a:rPr lang="en-US" sz="1030" dirty="0">
                 <a:solidFill>
                   <a:srgbClr val="D5E2EC"/>
                 </a:solidFill>
@@ -3793,137 +3900,9 @@
                 <a:ea typeface="Microsoft YaHei" pitchFamily="34" charset="-122"/>
                 <a:cs typeface="Microsoft YaHei" pitchFamily="34" charset="-120"/>
               </a:rPr>
-              <a:t>团队名称：锈鉴智检创新研发团队　负责人：谢宇</a:t>
-            </a:r>
-            <a:endParaRPr lang="en-US" sz="1080" dirty="0"/>
-          </a:p>
-          <a:p>
-            <a:pPr algn="l" indent="0" marL="0">
-              <a:lnSpc>
-                <a:spcPct val="130000"/>
-              </a:lnSpc>
-              <a:buNone/>
-            </a:pPr>
-            <a:r>
-              <a:rPr lang="en-US" sz="1080" dirty="0">
-                <a:solidFill>
-                  <a:srgbClr val="D5E2EC"/>
-                </a:solidFill>
-                <a:latin typeface="Microsoft YaHei" pitchFamily="34" charset="0"/>
-                <a:ea typeface="Microsoft YaHei" pitchFamily="34" charset="-122"/>
-                <a:cs typeface="Microsoft YaHei" pitchFamily="34" charset="-120"/>
-              </a:rPr>
-              <a:t>成员：曹晓倩、伍锦琦、谢耀宽、何军</a:t>
-            </a:r>
-            <a:endParaRPr lang="en-US" sz="1080" dirty="0"/>
-          </a:p>
-          <a:p>
-            <a:pPr algn="l" indent="0" marL="0">
-              <a:lnSpc>
-                <a:spcPct val="130000"/>
-              </a:lnSpc>
-              <a:buNone/>
-            </a:pPr>
-            <a:r>
-              <a:rPr lang="en-US" sz="1080" dirty="0">
-                <a:solidFill>
-                  <a:srgbClr val="D5E2EC"/>
-                </a:solidFill>
-                <a:latin typeface="Microsoft YaHei" pitchFamily="34" charset="0"/>
-                <a:ea typeface="Microsoft YaHei" pitchFamily="34" charset="-122"/>
-                <a:cs typeface="Microsoft YaHei" pitchFamily="34" charset="-120"/>
-              </a:rPr>
-              <a:t>指导教师：陈旭红、赖道辉</a:t>
-            </a:r>
-            <a:endParaRPr lang="en-US" sz="1080" dirty="0"/>
-          </a:p>
-        </p:txBody>
-      </p:sp>
-      <p:sp>
-        <p:nvSpPr>
-          <p:cNvPr id="17" name="Text 15"/>
-          <p:cNvSpPr/>
-          <p:nvPr/>
-        </p:nvSpPr>
-        <p:spPr>
-          <a:xfrm>
-            <a:off x="457200" y="4864608"/>
-            <a:ext cx="3657600" cy="237744"/>
-          </a:xfrm>
-          <a:prstGeom prst="rect">
-            <a:avLst/>
-          </a:prstGeom>
-          <a:noFill/>
-          <a:ln/>
-        </p:spPr>
-        <p:txBody>
-          <a:bodyPr wrap="square" lIns="0" tIns="0" rIns="0" bIns="0" rtlCol="0" anchor="t">
-            <a:normAutofit/>
-          </a:bodyPr>
-          <a:lstStyle/>
-          <a:p>
-            <a:pPr algn="l" indent="0" marL="0">
-              <a:lnSpc>
-                <a:spcPct val="112000"/>
-              </a:lnSpc>
-              <a:buNone/>
-            </a:pPr>
-            <a:r>
-              <a:rPr lang="en-US" sz="1050" dirty="0">
-                <a:solidFill>
-                  <a:srgbClr val="8FA8BC"/>
-                </a:solidFill>
-                <a:latin typeface="Microsoft YaHei" pitchFamily="34" charset="0"/>
-                <a:ea typeface="Microsoft YaHei" pitchFamily="34" charset="-122"/>
-                <a:cs typeface="Microsoft YaHei" pitchFamily="34" charset="-120"/>
-              </a:rPr>
-              <a:t>广西科技师范学院 先进制造工程学院</a:t>
-            </a:r>
-            <a:endParaRPr lang="en-US" sz="1050" dirty="0"/>
-          </a:p>
-        </p:txBody>
-      </p:sp>
-      <p:sp>
-        <p:nvSpPr>
-          <p:cNvPr id="18" name="Text 16"/>
-          <p:cNvSpPr/>
-          <p:nvPr/>
-        </p:nvSpPr>
-        <p:spPr>
-          <a:xfrm>
-            <a:off x="7680960" y="4846320"/>
-            <a:ext cx="1005840" cy="256032"/>
-          </a:xfrm>
-          <a:prstGeom prst="rect">
-            <a:avLst/>
-          </a:prstGeom>
-          <a:noFill/>
-          <a:ln/>
-        </p:spPr>
-        <p:txBody>
-          <a:bodyPr wrap="square" lIns="0" tIns="0" rIns="0" bIns="0" rtlCol="0" anchor="t">
-            <a:normAutofit/>
-          </a:bodyPr>
-          <a:lstStyle/>
-          <a:p>
-            <a:pPr algn="r" indent="0" marL="0">
-              <a:lnSpc>
-                <a:spcPct val="112000"/>
-              </a:lnSpc>
-              <a:buNone/>
-            </a:pPr>
-            <a:r>
-              <a:rPr lang="en-US" sz="1200" b="1" dirty="0">
-                <a:solidFill>
-                  <a:srgbClr val="0FA3B1"/>
-                </a:solidFill>
-                <a:latin typeface="Microsoft YaHei" pitchFamily="34" charset="0"/>
-                <a:ea typeface="Microsoft YaHei" pitchFamily="34" charset="-122"/>
-                <a:cs typeface="Microsoft YaHei" pitchFamily="34" charset="-120"/>
-              </a:rPr>
-              <a:t>2024.10</a:t>
-            </a:r>
-            <a:endParaRPr lang="en-US" sz="1200" dirty="0"/>
+              <a:t>陈旭红、赖道辉</a:t>
+            </a:r>
+            <a:endParaRPr lang="en-US" sz="1030" dirty="0"/>
           </a:p>
         </p:txBody>
       </p:sp>

--- a/deck/锈鉴智检-低成本高精度钢材质检专家.pptx
+++ b/deck/锈鉴智检-低成本高精度钢材质检专家.pptx
@@ -3260,7 +3260,7 @@
     <p:bg>
       <p:bgPr>
         <a:solidFill>
-          <a:srgbClr val="12283D"/>
+          <a:srgbClr val="161D30"/>
         </a:solidFill>
       </p:bgPr>
     </p:bg>
@@ -3293,7 +3293,7 @@
             <a:avLst/>
           </a:prstGeom>
           <a:solidFill>
-            <a:srgbClr val="F5A623"/>
+            <a:srgbClr val="F09F13"/>
           </a:solidFill>
           <a:ln/>
         </p:spPr>
@@ -3374,7 +3374,7 @@
             <a:r>
               <a:rPr lang="en-US" sz="1100" dirty="0">
                 <a:solidFill>
-                  <a:srgbClr val="8FA8BC"/>
+                  <a:srgbClr val="94A3B8"/>
                 </a:solidFill>
                 <a:latin typeface="Microsoft YaHei" pitchFamily="34" charset="0"/>
                 <a:ea typeface="Microsoft YaHei" pitchFamily="34" charset="-122"/>
@@ -3418,7 +3418,7 @@
             <a:r>
               <a:rPr lang="en-US" sz="1350" b="1" dirty="0">
                 <a:solidFill>
-                  <a:srgbClr val="F5A623"/>
+                  <a:srgbClr val="F09F13"/>
                 </a:solidFill>
                 <a:latin typeface="Microsoft YaHei" pitchFamily="34" charset="0"/>
                 <a:ea typeface="Microsoft YaHei" pitchFamily="34" charset="-122"/>
@@ -3489,7 +3489,7 @@
             <a:avLst/>
           </a:prstGeom>
           <a:solidFill>
-            <a:srgbClr val="F5A623"/>
+            <a:srgbClr val="F09F13"/>
           </a:solidFill>
           <a:ln/>
         </p:spPr>
@@ -3570,7 +3570,7 @@
             <a:r>
               <a:rPr lang="en-US" sz="1500" dirty="0">
                 <a:solidFill>
-                  <a:srgbClr val="AAC4D6"/>
+                  <a:srgbClr val="B0B8C4"/>
                 </a:solidFill>
                 <a:latin typeface="Microsoft YaHei" pitchFamily="34" charset="0"/>
                 <a:ea typeface="Microsoft YaHei" pitchFamily="34" charset="-122"/>
@@ -3634,7 +3634,7 @@
             <a:r>
               <a:rPr lang="en-US" sz="950" dirty="0">
                 <a:solidFill>
-                  <a:srgbClr val="8FA8BC"/>
+                  <a:srgbClr val="94A3B8"/>
                 </a:solidFill>
                 <a:latin typeface="Microsoft YaHei" pitchFamily="34" charset="0"/>
                 <a:ea typeface="Microsoft YaHei" pitchFamily="34" charset="-122"/>
@@ -3742,7 +3742,7 @@
             <a:r>
               <a:rPr lang="en-US" sz="950" dirty="0">
                 <a:solidFill>
-                  <a:srgbClr val="8FA8BC"/>
+                  <a:srgbClr val="94A3B8"/>
                 </a:solidFill>
                 <a:latin typeface="Microsoft YaHei" pitchFamily="34" charset="0"/>
                 <a:ea typeface="Microsoft YaHei" pitchFamily="34" charset="-122"/>
@@ -3850,7 +3850,7 @@
             <a:r>
               <a:rPr lang="en-US" sz="950" dirty="0">
                 <a:solidFill>
-                  <a:srgbClr val="8FA8BC"/>
+                  <a:srgbClr val="94A3B8"/>
                 </a:solidFill>
                 <a:latin typeface="Microsoft YaHei" pitchFamily="34" charset="0"/>
                 <a:ea typeface="Microsoft YaHei" pitchFamily="34" charset="-122"/>
